--- a/activity/M03A07/M03A07.pptx
+++ b/activity/M03A07/M03A07.pptx
@@ -11307,7 +11307,7 @@
         <p:spPr>
           <a:xfrm>
             <a:off x="2207568" y="2105561"/>
-            <a:ext cx="7776864" cy="2893100"/>
+            <a:ext cx="7776864" cy="2646878"/>
           </a:xfrm>
           <a:prstGeom prst="rect">
             <a:avLst/>
@@ -11404,7 +11404,7 @@
                 <a:latin typeface="Segoe UI Light" panose="020B0502040204020203" pitchFamily="34" charset="0"/>
                 <a:cs typeface="Segoe UI Light" panose="020B0502040204020203" pitchFamily="34" charset="0"/>
               </a:rPr>
-              <a:t>, parámetros y condiciones de frontera. HECRAS_v1_20161112.rar o HECRAS_v1a_20231124.zip.</a:t>
+              <a:t>, parámetros y condiciones de frontera. HECRAS_v1_20161112.rar.</a:t>
             </a:r>
           </a:p>
           <a:p>
@@ -14554,21 +14554,7 @@
                 <a:latin typeface="Segoe UI Light" panose="020B0502040204020203" pitchFamily="34" charset="0"/>
                 <a:cs typeface="Segoe UI Light" panose="020B0502040204020203" pitchFamily="34" charset="0"/>
               </a:rPr>
-              <a:t>El modelo hidráulico obtenido en esta clase puede ser descargado del repositorio de </a:t>
-            </a:r>
-            <a:r>
-              <a:rPr lang="es-CO" sz="1600">
-                <a:latin typeface="Segoe UI Light" panose="020B0502040204020203" pitchFamily="34" charset="0"/>
-                <a:cs typeface="Segoe UI Light" panose="020B0502040204020203" pitchFamily="34" charset="0"/>
-              </a:rPr>
-              <a:t>datos como </a:t>
-            </a:r>
-            <a:r>
-              <a:rPr lang="es-CO" sz="1600" dirty="0">
-                <a:latin typeface="Segoe UI Light" panose="020B0502040204020203" pitchFamily="34" charset="0"/>
-                <a:cs typeface="Segoe UI Light" panose="020B0502040204020203" pitchFamily="34" charset="0"/>
-              </a:rPr>
-              <a:t>HECRAS_v2a_20200923.zip o HECRAS_v2a_20231124.zip</a:t>
+              <a:t>El modelo hidráulico obtenido en esta clase puede ser descargado del repositorio de datos como HECRAS_v1a_20200923.zip o HECRAS_v1a_20231125.zip</a:t>
             </a:r>
           </a:p>
         </p:txBody>
@@ -14920,7 +14906,7 @@
                 <a:latin typeface="Segoe UI Light" panose="020B0502040204020203" pitchFamily="34" charset="0"/>
                 <a:cs typeface="Segoe UI Light" panose="020B0502040204020203" pitchFamily="34" charset="0"/>
               </a:rPr>
-              <a:t>/, descomprima el archivo del modelo hidráulico HECRAS_v1_20161112.rar y nombre la carpeta como HECRAS_v2a.</a:t>
+              <a:t>/, descomprima el archivo del modelo hidráulico HECRAS_v1_20161112.rar y nombre la carpeta como HECRAS_v1a.</a:t>
             </a:r>
           </a:p>
         </p:txBody>
@@ -15140,7 +15126,7 @@
                 <a:latin typeface="Segoe UI Light" panose="020B0502040204020203" pitchFamily="34" charset="0"/>
                 <a:cs typeface="Segoe UI Light" panose="020B0502040204020203" pitchFamily="34" charset="0"/>
               </a:rPr>
-              <a:t>En HEC-RAS, abra el proyecto c:\HCMC\ HECRAS_v2a\HECRAS_v2.prj.</a:t>
+              <a:t>En HEC-RAS, abra el proyecto c:\HCMC\ HECRAS_v1a\HECRAS_v1.prj.</a:t>
             </a:r>
           </a:p>
           <a:p>
@@ -15157,7 +15143,7 @@
                 <a:latin typeface="Segoe UI Light" panose="020B0502040204020203" pitchFamily="34" charset="0"/>
                 <a:cs typeface="Segoe UI Light" panose="020B0502040204020203" pitchFamily="34" charset="0"/>
               </a:rPr>
-              <a:t>Abra el editor de geometría 1D y cargue la geometría denominada HECRAS_v2 que contiene el cauce principal completo, incluidas las secciones naturales de inicio y entrega y el cauce lateral.</a:t>
+              <a:t>Abra el editor de geometría 1D y cargue la geometría denominada HECRAS_v1 que contiene el cauce principal completo, incluidas las secciones naturales de inicio y entrega y el cauce lateral.</a:t>
             </a:r>
           </a:p>
         </p:txBody>
